--- a/大三上/软件设计模式/重制版PPT/10 简单工厂模式（重制版）.pptx
+++ b/大三上/软件设计模式/重制版PPT/10 简单工厂模式（重制版）.pptx
@@ -14567,7 +14567,7 @@
           <p:spPr>
             <a:xfrm>
               <a:off x="6248400" y="2919412"/>
-              <a:ext cx="2164080" cy="466725"/>
+              <a:ext cx="2068830" cy="466725"/>
             </a:xfrm>
             <a:custGeom>
               <a:avLst/>
@@ -14576,7 +14576,7 @@
               <a:cxnLst/>
               <a:rect l="l" t="t" r="r" b="b"/>
               <a:pathLst>
-                <a:path w="2164080" h="466725">
+                <a:path w="2068830" h="466725">
                   <a:moveTo>
                     <a:pt x="0" y="466725"/>
                   </a:moveTo>
@@ -14584,10 +14584,10 @@
                     <a:pt x="0" y="170497"/>
                   </a:lnTo>
                   <a:lnTo>
-                    <a:pt x="2164080" y="170497"/>
+                    <a:pt x="2068830" y="170497"/>
                   </a:lnTo>
                   <a:lnTo>
-                    <a:pt x="2164080" y="0"/>
+                    <a:pt x="2068830" y="0"/>
                   </a:lnTo>
                 </a:path>
               </a:pathLst>
@@ -14608,7 +14608,7 @@
           </p:nvSpPr>
           <p:spPr>
             <a:xfrm>
-              <a:off x="8339138" y="2793682"/>
+              <a:off x="8243888" y="2793682"/>
               <a:ext cx="146685" cy="125730"/>
             </a:xfrm>
             <a:custGeom>
@@ -14650,8 +14650,8 @@
           </p:nvSpPr>
           <p:spPr>
             <a:xfrm>
-              <a:off x="8412480" y="2919412"/>
-              <a:ext cx="2164080" cy="466725"/>
+              <a:off x="8507730" y="2919412"/>
+              <a:ext cx="2068830" cy="466725"/>
             </a:xfrm>
             <a:custGeom>
               <a:avLst/>
@@ -14660,12 +14660,12 @@
               <a:cxnLst/>
               <a:rect l="l" t="t" r="r" b="b"/>
               <a:pathLst>
-                <a:path w="2164080" h="466725">
+                <a:path w="2068830" h="466725">
                   <a:moveTo>
-                    <a:pt x="2164080" y="466725"/>
+                    <a:pt x="2068830" y="466725"/>
                   </a:moveTo>
                   <a:lnTo>
-                    <a:pt x="2164080" y="170497"/>
+                    <a:pt x="2068830" y="170497"/>
                   </a:lnTo>
                   <a:lnTo>
                     <a:pt x="0" y="170497"/>
@@ -14692,7 +14692,7 @@
           </p:nvSpPr>
           <p:spPr>
             <a:xfrm>
-              <a:off x="8339138" y="2793682"/>
+              <a:off x="8434388" y="2793682"/>
               <a:ext cx="146685" cy="125730"/>
             </a:xfrm>
             <a:custGeom>
@@ -21318,7 +21318,7 @@
           <p:spPr>
             <a:xfrm>
               <a:off x="6248400" y="3035618"/>
-              <a:ext cx="2164080" cy="501015"/>
+              <a:ext cx="1973580" cy="501015"/>
             </a:xfrm>
             <a:custGeom>
               <a:avLst/>
@@ -21327,7 +21327,7 @@
               <a:cxnLst/>
               <a:rect l="l" t="t" r="r" b="b"/>
               <a:pathLst>
-                <a:path w="2164080" h="501015">
+                <a:path w="1973580" h="501015">
                   <a:moveTo>
                     <a:pt x="0" y="501015"/>
                   </a:moveTo>
@@ -21335,10 +21335,10 @@
                     <a:pt x="0" y="187642"/>
                   </a:lnTo>
                   <a:lnTo>
-                    <a:pt x="2164080" y="187642"/>
+                    <a:pt x="1973580" y="187642"/>
                   </a:lnTo>
                   <a:lnTo>
-                    <a:pt x="2164080" y="0"/>
+                    <a:pt x="1973580" y="0"/>
                   </a:lnTo>
                 </a:path>
               </a:pathLst>
@@ -21359,7 +21359,7 @@
           </p:nvSpPr>
           <p:spPr>
             <a:xfrm>
-              <a:off x="8339138" y="2909888"/>
+              <a:off x="8148638" y="2909888"/>
               <a:ext cx="146685" cy="125730"/>
             </a:xfrm>
             <a:custGeom>
@@ -21416,6 +21416,12 @@
                     <a:pt x="0" y="501015"/>
                   </a:moveTo>
                   <a:lnTo>
+                    <a:pt x="0" y="187642"/>
+                  </a:lnTo>
+                  <a:lnTo>
+                    <a:pt x="0" y="187642"/>
+                  </a:lnTo>
+                  <a:lnTo>
                     <a:pt x="0" y="0"/>
                   </a:lnTo>
                 </a:path>
@@ -21479,8 +21485,8 @@
           </p:nvSpPr>
           <p:spPr>
             <a:xfrm>
-              <a:off x="8412480" y="3035618"/>
-              <a:ext cx="2164080" cy="501015"/>
+              <a:off x="8602980" y="3035618"/>
+              <a:ext cx="1973580" cy="501015"/>
             </a:xfrm>
             <a:custGeom>
               <a:avLst/>
@@ -21489,12 +21495,12 @@
               <a:cxnLst/>
               <a:rect l="l" t="t" r="r" b="b"/>
               <a:pathLst>
-                <a:path w="2164080" h="501015">
+                <a:path w="1973580" h="501015">
                   <a:moveTo>
-                    <a:pt x="2164080" y="501015"/>
+                    <a:pt x="1973580" y="501015"/>
                   </a:moveTo>
                   <a:lnTo>
-                    <a:pt x="2164080" y="187642"/>
+                    <a:pt x="1973580" y="187642"/>
                   </a:lnTo>
                   <a:lnTo>
                     <a:pt x="0" y="187642"/>
@@ -21521,7 +21527,7 @@
           </p:nvSpPr>
           <p:spPr>
             <a:xfrm>
-              <a:off x="8339138" y="2909888"/>
+              <a:off x="8529638" y="2909888"/>
               <a:ext cx="146685" cy="125730"/>
             </a:xfrm>
             <a:custGeom>
@@ -32738,7 +32744,7 @@
           <p:spPr>
             <a:xfrm>
               <a:off x="7150418" y="3136582"/>
-              <a:ext cx="1803082" cy="624840"/>
+              <a:ext cx="1707832" cy="624840"/>
             </a:xfrm>
             <a:custGeom>
               <a:avLst/>
@@ -32747,7 +32753,7 @@
               <a:cxnLst/>
               <a:rect l="l" t="t" r="r" b="b"/>
               <a:pathLst>
-                <a:path w="1803082" h="624840">
+                <a:path w="1707832" h="624840">
                   <a:moveTo>
                     <a:pt x="0" y="624840"/>
                   </a:moveTo>
@@ -32755,10 +32761,10 @@
                     <a:pt x="0" y="249555"/>
                   </a:lnTo>
                   <a:lnTo>
-                    <a:pt x="1803082" y="249555"/>
+                    <a:pt x="1707832" y="249555"/>
                   </a:lnTo>
                   <a:lnTo>
-                    <a:pt x="1803082" y="0"/>
+                    <a:pt x="1707832" y="0"/>
                   </a:lnTo>
                 </a:path>
               </a:pathLst>
@@ -32779,7 +32785,7 @@
           </p:nvSpPr>
           <p:spPr>
             <a:xfrm>
-              <a:off x="8880158" y="3010852"/>
+              <a:off x="8784908" y="3010852"/>
               <a:ext cx="146685" cy="125730"/>
             </a:xfrm>
             <a:custGeom>
@@ -32821,8 +32827,8 @@
           </p:nvSpPr>
           <p:spPr>
             <a:xfrm>
-              <a:off x="8953500" y="3136582"/>
-              <a:ext cx="1803082" cy="624840"/>
+              <a:off x="9048750" y="3136582"/>
+              <a:ext cx="1707832" cy="624840"/>
             </a:xfrm>
             <a:custGeom>
               <a:avLst/>
@@ -32831,12 +32837,12 @@
               <a:cxnLst/>
               <a:rect l="l" t="t" r="r" b="b"/>
               <a:pathLst>
-                <a:path w="1803082" h="624840">
+                <a:path w="1707832" h="624840">
                   <a:moveTo>
-                    <a:pt x="1803082" y="624840"/>
+                    <a:pt x="1707832" y="624840"/>
                   </a:moveTo>
                   <a:lnTo>
-                    <a:pt x="1803082" y="249555"/>
+                    <a:pt x="1707832" y="249555"/>
                   </a:lnTo>
                   <a:lnTo>
                     <a:pt x="0" y="249555"/>
@@ -32863,7 +32869,7 @@
           </p:nvSpPr>
           <p:spPr>
             <a:xfrm>
-              <a:off x="8880158" y="3010852"/>
+              <a:off x="8975408" y="3010852"/>
               <a:ext cx="146685" cy="125730"/>
             </a:xfrm>
             <a:custGeom>
@@ -34745,7 +34751,7 @@
           <p:spPr>
             <a:xfrm>
               <a:off x="6789420" y="3038475"/>
-              <a:ext cx="1947862" cy="651510"/>
+              <a:ext cx="1852612" cy="651510"/>
             </a:xfrm>
             <a:custGeom>
               <a:avLst/>
@@ -34754,7 +34760,7 @@
               <a:cxnLst/>
               <a:rect l="l" t="t" r="r" b="b"/>
               <a:pathLst>
-                <a:path w="1947862" h="651510">
+                <a:path w="1852612" h="651510">
                   <a:moveTo>
                     <a:pt x="0" y="651510"/>
                   </a:moveTo>
@@ -34762,10 +34768,10 @@
                     <a:pt x="0" y="262890"/>
                   </a:lnTo>
                   <a:lnTo>
-                    <a:pt x="1947862" y="262890"/>
+                    <a:pt x="1852612" y="262890"/>
                   </a:lnTo>
                   <a:lnTo>
-                    <a:pt x="1947862" y="0"/>
+                    <a:pt x="1852612" y="0"/>
                   </a:lnTo>
                 </a:path>
               </a:pathLst>
@@ -34786,7 +34792,7 @@
           </p:nvSpPr>
           <p:spPr>
             <a:xfrm>
-              <a:off x="8663940" y="2912745"/>
+              <a:off x="8568690" y="2912745"/>
               <a:ext cx="146685" cy="125730"/>
             </a:xfrm>
             <a:custGeom>
@@ -34829,7 +34835,7 @@
           <p:spPr>
             <a:xfrm>
               <a:off x="8737282" y="3038475"/>
-              <a:ext cx="9525" cy="651510"/>
+              <a:ext cx="95250" cy="651510"/>
             </a:xfrm>
             <a:custGeom>
               <a:avLst/>
@@ -34838,12 +34844,18 @@
               <a:cxnLst/>
               <a:rect l="l" t="t" r="r" b="b"/>
               <a:pathLst>
-                <a:path w="9525" h="651510">
+                <a:path w="95250" h="651510">
                   <a:moveTo>
                     <a:pt x="0" y="651510"/>
                   </a:moveTo>
                   <a:lnTo>
-                    <a:pt x="0" y="0"/>
+                    <a:pt x="0" y="262890"/>
+                  </a:lnTo>
+                  <a:lnTo>
+                    <a:pt x="95250" y="262890"/>
+                  </a:lnTo>
+                  <a:lnTo>
+                    <a:pt x="95250" y="0"/>
                   </a:lnTo>
                 </a:path>
               </a:pathLst>
@@ -34864,7 +34876,7 @@
           </p:nvSpPr>
           <p:spPr>
             <a:xfrm>
-              <a:off x="8663940" y="2912745"/>
+              <a:off x="8759190" y="2912745"/>
               <a:ext cx="146685" cy="125730"/>
             </a:xfrm>
             <a:custGeom>
@@ -45881,9 +45893,9 @@
         <p:grpSpPr>
           <a:xfrm>
             <a:off x="533400" y="1535430"/>
-            <a:ext cx="5364480" cy="2257425"/>
+            <a:ext cx="5566410" cy="1685925"/>
             <a:chOff x="533400" y="1535430"/>
-            <a:chExt cx="5364480" cy="2257425"/>
+            <a:chExt cx="5566410" cy="1685925"/>
           </a:xfrm>
         </p:grpSpPr>
         <p:sp>
@@ -46059,27 +46071,23 @@
           <p:spPr>
             <a:xfrm>
               <a:off x="834390" y="1893570"/>
-              <a:ext cx="4968240" cy="579120"/>
-            </a:xfrm>
-            <a:prstGeom prst="rect">
-              <a:avLst/>
-            </a:prstGeom>
-            <a:noFill/>
-            <a:ln>
-              <a:noFill/>
-            </a:ln>
-          </p:spPr>
-          <p:txBody>
-            <a:bodyPr wrap="none" lIns="0" tIns="0" rIns="0" bIns="0" anchor="t" anchorCtr="0">
-              <a:spAutoFit/>
-            </a:bodyPr>
-            <a:lstStyle/>
-            <a:p>
-              <a:pPr algn="l">
-                <a:lnSpc>
-                  <a:spcPts val="2250"/>
-                </a:lnSpc>
-              </a:pPr>
+              <a:ext cx="5063490" cy="293370"/>
+            </a:xfrm>
+            <a:prstGeom prst="rect">
+              <a:avLst/>
+            </a:prstGeom>
+            <a:noFill/>
+            <a:ln>
+              <a:noFill/>
+            </a:ln>
+          </p:spPr>
+          <p:txBody>
+            <a:bodyPr wrap="none" lIns="0" tIns="0" rIns="0" bIns="0" anchor="t" anchorCtr="0">
+              <a:spAutoFit/>
+            </a:bodyPr>
+            <a:lstStyle/>
+            <a:p>
+              <a:pPr algn="l"/>
               <a:r>
                 <a:rPr lang="zh-CN" sz="1500" dirty="0">
                   <a:solidFill>
@@ -46089,19 +46097,7 @@
                   <a:ea typeface="+mn-ea"/>
                   <a:cs typeface="+mn-cs"/>
                 </a:rPr>
-                <a:t>简单工厂用一个类按参数返回不同子类的实例，别名静态工</a:t>
-              </a:r>
-              <a:br/>
-              <a:r>
-                <a:rPr lang="zh-CN" sz="1500" dirty="0">
-                  <a:solidFill>
-                    <a:srgbClr val="1F2937"/>
-                  </a:solidFill>
-                  <a:latin typeface="+mn-lt"/>
-                  <a:ea typeface="+mn-ea"/>
-                  <a:cs typeface="+mn-cs"/>
-                </a:rPr>
-                <a:t>厂方法</a:t>
+                <a:t>简单工厂按参数返回不同子类的实例，别名静态工厂方法</a:t>
               </a:r>
             </a:p>
           </p:txBody>
@@ -46114,7 +46110,7 @@
           </p:nvSpPr>
           <p:spPr>
             <a:xfrm>
-              <a:off x="533400" y="2510790"/>
+              <a:off x="533400" y="2225040"/>
               <a:ext cx="213360" cy="213360"/>
             </a:xfrm>
             <a:prstGeom prst="ellipse">
@@ -46136,7 +46132,7 @@
           </p:nvSpPr>
           <p:spPr>
             <a:xfrm>
-              <a:off x="595249" y="2553081"/>
+              <a:off x="595249" y="2267331"/>
               <a:ext cx="89661" cy="199492"/>
             </a:xfrm>
             <a:prstGeom prst="rect">
@@ -46176,28 +46172,24 @@
           </p:nvSpPr>
           <p:spPr>
             <a:xfrm>
-              <a:off x="834390" y="2524125"/>
-              <a:ext cx="4968240" cy="579120"/>
-            </a:xfrm>
-            <a:prstGeom prst="rect">
-              <a:avLst/>
-            </a:prstGeom>
-            <a:noFill/>
-            <a:ln>
-              <a:noFill/>
-            </a:ln>
-          </p:spPr>
-          <p:txBody>
-            <a:bodyPr wrap="none" lIns="0" tIns="0" rIns="0" bIns="0" anchor="t" anchorCtr="0">
-              <a:spAutoFit/>
-            </a:bodyPr>
-            <a:lstStyle/>
-            <a:p>
-              <a:pPr algn="l">
-                <a:lnSpc>
-                  <a:spcPts val="2250"/>
-                </a:lnSpc>
-              </a:pPr>
+              <a:off x="834390" y="2238375"/>
+              <a:ext cx="5265420" cy="293370"/>
+            </a:xfrm>
+            <a:prstGeom prst="rect">
+              <a:avLst/>
+            </a:prstGeom>
+            <a:noFill/>
+            <a:ln>
+              <a:noFill/>
+            </a:ln>
+          </p:spPr>
+          <p:txBody>
+            <a:bodyPr wrap="none" lIns="0" tIns="0" rIns="0" bIns="0" anchor="t" anchorCtr="0">
+              <a:spAutoFit/>
+            </a:bodyPr>
+            <a:lstStyle/>
+            <a:p>
+              <a:pPr algn="l"/>
               <a:r>
                 <a:rPr lang="zh-CN" sz="1500" dirty="0">
                   <a:solidFill>
@@ -46207,19 +46199,7 @@
                   <a:ea typeface="+mn-ea"/>
                   <a:cs typeface="+mn-cs"/>
                 </a:rPr>
-                <a:t>三个角色：工厂负责创建，抽象产品定接口，具体产品是创</a:t>
-              </a:r>
-              <a:br/>
-              <a:r>
-                <a:rPr lang="zh-CN" sz="1500" dirty="0">
-                  <a:solidFill>
-                    <a:srgbClr val="1F2937"/>
-                  </a:solidFill>
-                  <a:latin typeface="+mn-lt"/>
-                  <a:ea typeface="+mn-ea"/>
-                  <a:cs typeface="+mn-cs"/>
-                </a:rPr>
-                <a:t>建目标</a:t>
+                <a:t>三个角色：工厂管创建，抽象产品定接口，具体产品被创建</a:t>
               </a:r>
             </a:p>
           </p:txBody>
@@ -46232,7 +46212,7 @@
           </p:nvSpPr>
           <p:spPr>
             <a:xfrm>
-              <a:off x="533400" y="3141345"/>
+              <a:off x="533400" y="2569845"/>
               <a:ext cx="213360" cy="213360"/>
             </a:xfrm>
             <a:prstGeom prst="ellipse">
@@ -46254,7 +46234,7 @@
           </p:nvSpPr>
           <p:spPr>
             <a:xfrm>
-              <a:off x="595249" y="3183636"/>
+              <a:off x="595249" y="2612136"/>
               <a:ext cx="89661" cy="199492"/>
             </a:xfrm>
             <a:prstGeom prst="rect">
@@ -46294,7 +46274,7 @@
           </p:nvSpPr>
           <p:spPr>
             <a:xfrm>
-              <a:off x="834390" y="3154680"/>
+              <a:off x="834390" y="2583180"/>
               <a:ext cx="5063490" cy="293370"/>
             </a:xfrm>
             <a:prstGeom prst="rect">
@@ -46334,7 +46314,7 @@
           </p:nvSpPr>
           <p:spPr>
             <a:xfrm>
-              <a:off x="533400" y="3486150"/>
+              <a:off x="533400" y="2914650"/>
               <a:ext cx="213360" cy="213360"/>
             </a:xfrm>
             <a:prstGeom prst="ellipse">
@@ -46356,7 +46336,7 @@
           </p:nvSpPr>
           <p:spPr>
             <a:xfrm>
-              <a:off x="595249" y="3528441"/>
+              <a:off x="595249" y="2956941"/>
               <a:ext cx="89661" cy="199492"/>
             </a:xfrm>
             <a:prstGeom prst="rect">
@@ -46396,7 +46376,7 @@
           </p:nvSpPr>
           <p:spPr>
             <a:xfrm>
-              <a:off x="834390" y="3499485"/>
+              <a:off x="834390" y="2927985"/>
               <a:ext cx="4053840" cy="293370"/>
             </a:xfrm>
             <a:prstGeom prst="rect">
@@ -46431,7 +46411,1026 @@
       </p:grpSp>
       <p:grpSp>
         <p:nvGrpSpPr>
-          <p:cNvPr id="34" name="c2-kv-1"/>
+          <p:cNvPr id="55" name="c1-uml-2"/>
+          <p:cNvGrpSpPr/>
+          <p:nvPr/>
+        </p:nvGrpSpPr>
+        <p:grpSpPr>
+          <a:xfrm>
+            <a:off x="801052" y="3614738"/>
+            <a:ext cx="5091114" cy="1700212"/>
+            <a:chOff x="801052" y="3614738"/>
+            <a:chExt cx="5091114" cy="1700212"/>
+          </a:xfrm>
+        </p:grpSpPr>
+        <p:sp>
+          <p:nvSpPr>
+            <p:cNvPr id="23" name="Freeform 23"/>
+            <p:cNvSpPr/>
+            <p:nvPr/>
+          </p:nvSpPr>
+          <p:spPr>
+            <a:xfrm>
+              <a:off x="1471612" y="4329112"/>
+              <a:ext cx="1780222" cy="398145"/>
+            </a:xfrm>
+            <a:custGeom>
+              <a:avLst/>
+              <a:gdLst/>
+              <a:ahLst/>
+              <a:cxnLst/>
+              <a:rect l="l" t="t" r="r" b="b"/>
+              <a:pathLst>
+                <a:path w="1780222" h="398145">
+                  <a:moveTo>
+                    <a:pt x="0" y="398145"/>
+                  </a:moveTo>
+                  <a:lnTo>
+                    <a:pt x="0" y="136208"/>
+                  </a:lnTo>
+                  <a:lnTo>
+                    <a:pt x="1780222" y="136208"/>
+                  </a:lnTo>
+                  <a:lnTo>
+                    <a:pt x="1780222" y="0"/>
+                  </a:lnTo>
+                </a:path>
+              </a:pathLst>
+            </a:custGeom>
+            <a:noFill/>
+            <a:ln w="15240">
+              <a:solidFill>
+                <a:srgbClr val="1F2937"/>
+              </a:solidFill>
+            </a:ln>
+          </p:spPr>
+        </p:sp>
+        <p:sp>
+          <p:nvSpPr>
+            <p:cNvPr id="24" name="Freeform 24"/>
+            <p:cNvSpPr/>
+            <p:nvPr/>
+          </p:nvSpPr>
+          <p:spPr>
+            <a:xfrm>
+              <a:off x="3178492" y="4203382"/>
+              <a:ext cx="146685" cy="125730"/>
+            </a:xfrm>
+            <a:custGeom>
+              <a:avLst/>
+              <a:gdLst/>
+              <a:ahLst/>
+              <a:cxnLst/>
+              <a:rect l="l" t="t" r="r" b="b"/>
+              <a:pathLst>
+                <a:path w="146685" h="125730">
+                  <a:moveTo>
+                    <a:pt x="73342" y="0"/>
+                  </a:moveTo>
+                  <a:lnTo>
+                    <a:pt x="146685" y="125730"/>
+                  </a:lnTo>
+                  <a:lnTo>
+                    <a:pt x="0" y="125730"/>
+                  </a:lnTo>
+                  <a:close/>
+                </a:path>
+              </a:pathLst>
+            </a:custGeom>
+            <a:solidFill>
+              <a:srgbClr val="FFFFFF"/>
+            </a:solidFill>
+            <a:ln w="15240">
+              <a:solidFill>
+                <a:srgbClr val="1F2937"/>
+              </a:solidFill>
+            </a:ln>
+          </p:spPr>
+        </p:sp>
+        <p:sp>
+          <p:nvSpPr>
+            <p:cNvPr id="25" name="Freeform 25"/>
+            <p:cNvSpPr/>
+            <p:nvPr/>
+          </p:nvSpPr>
+          <p:spPr>
+            <a:xfrm>
+              <a:off x="3442335" y="4329112"/>
+              <a:ext cx="1780222" cy="398145"/>
+            </a:xfrm>
+            <a:custGeom>
+              <a:avLst/>
+              <a:gdLst/>
+              <a:ahLst/>
+              <a:cxnLst/>
+              <a:rect l="l" t="t" r="r" b="b"/>
+              <a:pathLst>
+                <a:path w="1780222" h="398145">
+                  <a:moveTo>
+                    <a:pt x="1780222" y="398145"/>
+                  </a:moveTo>
+                  <a:lnTo>
+                    <a:pt x="1780222" y="136208"/>
+                  </a:lnTo>
+                  <a:lnTo>
+                    <a:pt x="0" y="136208"/>
+                  </a:lnTo>
+                  <a:lnTo>
+                    <a:pt x="0" y="0"/>
+                  </a:lnTo>
+                </a:path>
+              </a:pathLst>
+            </a:custGeom>
+            <a:noFill/>
+            <a:ln w="15240">
+              <a:solidFill>
+                <a:srgbClr val="1F2937"/>
+              </a:solidFill>
+            </a:ln>
+          </p:spPr>
+        </p:sp>
+        <p:sp>
+          <p:nvSpPr>
+            <p:cNvPr id="26" name="Freeform 26"/>
+            <p:cNvSpPr/>
+            <p:nvPr/>
+          </p:nvSpPr>
+          <p:spPr>
+            <a:xfrm>
+              <a:off x="3368992" y="4203382"/>
+              <a:ext cx="146685" cy="125730"/>
+            </a:xfrm>
+            <a:custGeom>
+              <a:avLst/>
+              <a:gdLst/>
+              <a:ahLst/>
+              <a:cxnLst/>
+              <a:rect l="l" t="t" r="r" b="b"/>
+              <a:pathLst>
+                <a:path w="146685" h="125730">
+                  <a:moveTo>
+                    <a:pt x="73342" y="0"/>
+                  </a:moveTo>
+                  <a:lnTo>
+                    <a:pt x="146685" y="125730"/>
+                  </a:lnTo>
+                  <a:lnTo>
+                    <a:pt x="0" y="125730"/>
+                  </a:lnTo>
+                  <a:close/>
+                </a:path>
+              </a:pathLst>
+            </a:custGeom>
+            <a:solidFill>
+              <a:srgbClr val="FFFFFF"/>
+            </a:solidFill>
+            <a:ln w="15240">
+              <a:solidFill>
+                <a:srgbClr val="1F2937"/>
+              </a:solidFill>
+            </a:ln>
+          </p:spPr>
+        </p:sp>
+        <p:sp>
+          <p:nvSpPr>
+            <p:cNvPr id="27" name="Freeform 27"/>
+            <p:cNvSpPr/>
+            <p:nvPr/>
+          </p:nvSpPr>
+          <p:spPr>
+            <a:xfrm>
+              <a:off x="2141220" y="5021580"/>
+              <a:ext cx="423862" cy="9525"/>
+            </a:xfrm>
+            <a:custGeom>
+              <a:avLst/>
+              <a:gdLst/>
+              <a:ahLst/>
+              <a:cxnLst/>
+              <a:rect l="l" t="t" r="r" b="b"/>
+              <a:pathLst>
+                <a:path w="423862" h="9525">
+                  <a:moveTo>
+                    <a:pt x="423862" y="0"/>
+                  </a:moveTo>
+                  <a:lnTo>
+                    <a:pt x="0" y="0"/>
+                  </a:lnTo>
+                </a:path>
+              </a:pathLst>
+            </a:custGeom>
+            <a:noFill/>
+            <a:ln w="15240">
+              <a:solidFill>
+                <a:srgbClr val="1F2937"/>
+              </a:solidFill>
+              <a:custDash>
+                <a:ds d="375000" sp="250000"/>
+              </a:custDash>
+            </a:ln>
+          </p:spPr>
+        </p:sp>
+        <p:sp>
+          <p:nvSpPr>
+            <p:cNvPr id="28" name="Freeform 28"/>
+            <p:cNvSpPr/>
+            <p:nvPr/>
+          </p:nvSpPr>
+          <p:spPr>
+            <a:xfrm>
+              <a:off x="2141220" y="4964430"/>
+              <a:ext cx="104775" cy="114300"/>
+            </a:xfrm>
+            <a:custGeom>
+              <a:avLst/>
+              <a:gdLst/>
+              <a:ahLst/>
+              <a:cxnLst/>
+              <a:rect l="l" t="t" r="r" b="b"/>
+              <a:pathLst>
+                <a:path w="104775" h="114300">
+                  <a:moveTo>
+                    <a:pt x="104775" y="0"/>
+                  </a:moveTo>
+                  <a:lnTo>
+                    <a:pt x="0" y="57150"/>
+                  </a:lnTo>
+                  <a:lnTo>
+                    <a:pt x="104775" y="114300"/>
+                  </a:lnTo>
+                </a:path>
+              </a:pathLst>
+            </a:custGeom>
+            <a:noFill/>
+            <a:ln w="15240">
+              <a:solidFill>
+                <a:srgbClr val="1F2937"/>
+              </a:solidFill>
+            </a:ln>
+          </p:spPr>
+        </p:sp>
+        <p:sp>
+          <p:nvSpPr>
+            <p:cNvPr id="29" name="Freeform 29"/>
+            <p:cNvSpPr/>
+            <p:nvPr/>
+          </p:nvSpPr>
+          <p:spPr>
+            <a:xfrm>
+              <a:off x="4129088" y="5021580"/>
+              <a:ext cx="422910" cy="9525"/>
+            </a:xfrm>
+            <a:custGeom>
+              <a:avLst/>
+              <a:gdLst/>
+              <a:ahLst/>
+              <a:cxnLst/>
+              <a:rect l="l" t="t" r="r" b="b"/>
+              <a:pathLst>
+                <a:path w="422910" h="9525">
+                  <a:moveTo>
+                    <a:pt x="0" y="0"/>
+                  </a:moveTo>
+                  <a:lnTo>
+                    <a:pt x="422910" y="0"/>
+                  </a:lnTo>
+                </a:path>
+              </a:pathLst>
+            </a:custGeom>
+            <a:noFill/>
+            <a:ln w="15240">
+              <a:solidFill>
+                <a:srgbClr val="1F2937"/>
+              </a:solidFill>
+              <a:custDash>
+                <a:ds d="375000" sp="250000"/>
+              </a:custDash>
+            </a:ln>
+          </p:spPr>
+        </p:sp>
+        <p:sp>
+          <p:nvSpPr>
+            <p:cNvPr id="30" name="Freeform 30"/>
+            <p:cNvSpPr/>
+            <p:nvPr/>
+          </p:nvSpPr>
+          <p:spPr>
+            <a:xfrm>
+              <a:off x="4447222" y="4964430"/>
+              <a:ext cx="104775" cy="114300"/>
+            </a:xfrm>
+            <a:custGeom>
+              <a:avLst/>
+              <a:gdLst/>
+              <a:ahLst/>
+              <a:cxnLst/>
+              <a:rect l="l" t="t" r="r" b="b"/>
+              <a:pathLst>
+                <a:path w="104775" h="114300">
+                  <a:moveTo>
+                    <a:pt x="0" y="114300"/>
+                  </a:moveTo>
+                  <a:lnTo>
+                    <a:pt x="104775" y="57150"/>
+                  </a:lnTo>
+                  <a:lnTo>
+                    <a:pt x="0" y="0"/>
+                  </a:lnTo>
+                </a:path>
+              </a:pathLst>
+            </a:custGeom>
+            <a:noFill/>
+            <a:ln w="15240">
+              <a:solidFill>
+                <a:srgbClr val="1F2937"/>
+              </a:solidFill>
+            </a:ln>
+          </p:spPr>
+        </p:sp>
+        <p:sp>
+          <p:nvSpPr>
+            <p:cNvPr id="31" name="Rectangle 31"/>
+            <p:cNvSpPr/>
+            <p:nvPr/>
+          </p:nvSpPr>
+          <p:spPr>
+            <a:xfrm>
+              <a:off x="2775585" y="3614738"/>
+              <a:ext cx="1143000" cy="587692"/>
+            </a:xfrm>
+            <a:prstGeom prst="rect">
+              <a:avLst/>
+            </a:prstGeom>
+            <a:solidFill>
+              <a:srgbClr val="FFFFFF"/>
+            </a:solidFill>
+            <a:ln w="14288">
+              <a:solidFill>
+                <a:srgbClr val="5B3FA0"/>
+              </a:solidFill>
+            </a:ln>
+          </p:spPr>
+        </p:sp>
+        <p:sp>
+          <p:nvSpPr>
+            <p:cNvPr id="32" name="Rectangle 32"/>
+            <p:cNvSpPr/>
+            <p:nvPr/>
+          </p:nvSpPr>
+          <p:spPr>
+            <a:xfrm>
+              <a:off x="2782252" y="3622358"/>
+              <a:ext cx="1128712" cy="227648"/>
+            </a:xfrm>
+            <a:prstGeom prst="rect">
+              <a:avLst/>
+            </a:prstGeom>
+            <a:solidFill>
+              <a:srgbClr val="EEEAF7"/>
+            </a:solidFill>
+            <a:ln>
+              <a:noFill/>
+            </a:ln>
+          </p:spPr>
+        </p:sp>
+        <p:sp>
+          <p:nvSpPr>
+            <p:cNvPr id="33" name="Rectangle 33"/>
+            <p:cNvSpPr/>
+            <p:nvPr/>
+          </p:nvSpPr>
+          <p:spPr>
+            <a:xfrm>
+              <a:off x="2775585" y="3845242"/>
+              <a:ext cx="1143000" cy="9525"/>
+            </a:xfrm>
+            <a:prstGeom prst="rect">
+              <a:avLst/>
+            </a:prstGeom>
+            <a:solidFill>
+              <a:srgbClr val="5B3FA0"/>
+            </a:solidFill>
+            <a:ln>
+              <a:noFill/>
+            </a:ln>
+          </p:spPr>
+        </p:sp>
+        <p:sp>
+          <p:nvSpPr>
+            <p:cNvPr id="34" name="Rectangle 34"/>
+            <p:cNvSpPr/>
+            <p:nvPr/>
+          </p:nvSpPr>
+          <p:spPr>
+            <a:xfrm>
+              <a:off x="2775585" y="3940492"/>
+              <a:ext cx="1143000" cy="9525"/>
+            </a:xfrm>
+            <a:prstGeom prst="rect">
+              <a:avLst/>
+            </a:prstGeom>
+            <a:solidFill>
+              <a:srgbClr val="5B3FA0"/>
+            </a:solidFill>
+            <a:ln>
+              <a:noFill/>
+            </a:ln>
+          </p:spPr>
+        </p:sp>
+        <p:sp>
+          <p:nvSpPr>
+            <p:cNvPr id="35" name="Rectangle 35"/>
+            <p:cNvSpPr/>
+            <p:nvPr/>
+          </p:nvSpPr>
+          <p:spPr>
+            <a:xfrm>
+              <a:off x="801052" y="4727258"/>
+              <a:ext cx="1340168" cy="587692"/>
+            </a:xfrm>
+            <a:prstGeom prst="rect">
+              <a:avLst/>
+            </a:prstGeom>
+            <a:solidFill>
+              <a:srgbClr val="FFFFFF"/>
+            </a:solidFill>
+            <a:ln w="14288">
+              <a:solidFill>
+                <a:srgbClr val="5B3FA0"/>
+              </a:solidFill>
+            </a:ln>
+          </p:spPr>
+        </p:sp>
+        <p:sp>
+          <p:nvSpPr>
+            <p:cNvPr id="36" name="Rectangle 36"/>
+            <p:cNvSpPr/>
+            <p:nvPr/>
+          </p:nvSpPr>
+          <p:spPr>
+            <a:xfrm>
+              <a:off x="807720" y="4734878"/>
+              <a:ext cx="1325880" cy="227648"/>
+            </a:xfrm>
+            <a:prstGeom prst="rect">
+              <a:avLst/>
+            </a:prstGeom>
+            <a:solidFill>
+              <a:srgbClr val="EEEAF7"/>
+            </a:solidFill>
+            <a:ln>
+              <a:noFill/>
+            </a:ln>
+          </p:spPr>
+        </p:sp>
+        <p:sp>
+          <p:nvSpPr>
+            <p:cNvPr id="37" name="Rectangle 37"/>
+            <p:cNvSpPr/>
+            <p:nvPr/>
+          </p:nvSpPr>
+          <p:spPr>
+            <a:xfrm>
+              <a:off x="801052" y="4957762"/>
+              <a:ext cx="1340168" cy="9525"/>
+            </a:xfrm>
+            <a:prstGeom prst="rect">
+              <a:avLst/>
+            </a:prstGeom>
+            <a:solidFill>
+              <a:srgbClr val="5B3FA0"/>
+            </a:solidFill>
+            <a:ln>
+              <a:noFill/>
+            </a:ln>
+          </p:spPr>
+        </p:sp>
+        <p:sp>
+          <p:nvSpPr>
+            <p:cNvPr id="38" name="Rectangle 38"/>
+            <p:cNvSpPr/>
+            <p:nvPr/>
+          </p:nvSpPr>
+          <p:spPr>
+            <a:xfrm>
+              <a:off x="801052" y="5053012"/>
+              <a:ext cx="1340168" cy="9525"/>
+            </a:xfrm>
+            <a:prstGeom prst="rect">
+              <a:avLst/>
+            </a:prstGeom>
+            <a:solidFill>
+              <a:srgbClr val="5B3FA0"/>
+            </a:solidFill>
+            <a:ln>
+              <a:noFill/>
+            </a:ln>
+          </p:spPr>
+        </p:sp>
+        <p:sp>
+          <p:nvSpPr>
+            <p:cNvPr id="39" name="Rectangle 39"/>
+            <p:cNvSpPr/>
+            <p:nvPr/>
+          </p:nvSpPr>
+          <p:spPr>
+            <a:xfrm>
+              <a:off x="2565082" y="4727258"/>
+              <a:ext cx="1564005" cy="587692"/>
+            </a:xfrm>
+            <a:prstGeom prst="rect">
+              <a:avLst/>
+            </a:prstGeom>
+            <a:solidFill>
+              <a:srgbClr val="FFFFFF"/>
+            </a:solidFill>
+            <a:ln w="14288">
+              <a:solidFill>
+                <a:srgbClr val="5B3FA0"/>
+              </a:solidFill>
+            </a:ln>
+          </p:spPr>
+        </p:sp>
+        <p:sp>
+          <p:nvSpPr>
+            <p:cNvPr id="40" name="Rectangle 40"/>
+            <p:cNvSpPr/>
+            <p:nvPr/>
+          </p:nvSpPr>
+          <p:spPr>
+            <a:xfrm>
+              <a:off x="2571750" y="4734878"/>
+              <a:ext cx="1549718" cy="227648"/>
+            </a:xfrm>
+            <a:prstGeom prst="rect">
+              <a:avLst/>
+            </a:prstGeom>
+            <a:solidFill>
+              <a:srgbClr val="EEEAF7"/>
+            </a:solidFill>
+            <a:ln>
+              <a:noFill/>
+            </a:ln>
+          </p:spPr>
+        </p:sp>
+        <p:sp>
+          <p:nvSpPr>
+            <p:cNvPr id="41" name="Rectangle 41"/>
+            <p:cNvSpPr/>
+            <p:nvPr/>
+          </p:nvSpPr>
+          <p:spPr>
+            <a:xfrm>
+              <a:off x="2565082" y="4957762"/>
+              <a:ext cx="1564005" cy="9525"/>
+            </a:xfrm>
+            <a:prstGeom prst="rect">
+              <a:avLst/>
+            </a:prstGeom>
+            <a:solidFill>
+              <a:srgbClr val="5B3FA0"/>
+            </a:solidFill>
+            <a:ln>
+              <a:noFill/>
+            </a:ln>
+          </p:spPr>
+        </p:sp>
+        <p:sp>
+          <p:nvSpPr>
+            <p:cNvPr id="42" name="Rectangle 42"/>
+            <p:cNvSpPr/>
+            <p:nvPr/>
+          </p:nvSpPr>
+          <p:spPr>
+            <a:xfrm>
+              <a:off x="2565082" y="5053012"/>
+              <a:ext cx="1564005" cy="9525"/>
+            </a:xfrm>
+            <a:prstGeom prst="rect">
+              <a:avLst/>
+            </a:prstGeom>
+            <a:solidFill>
+              <a:srgbClr val="5B3FA0"/>
+            </a:solidFill>
+            <a:ln>
+              <a:noFill/>
+            </a:ln>
+          </p:spPr>
+        </p:sp>
+        <p:sp>
+          <p:nvSpPr>
+            <p:cNvPr id="43" name="Rectangle 43"/>
+            <p:cNvSpPr/>
+            <p:nvPr/>
+          </p:nvSpPr>
+          <p:spPr>
+            <a:xfrm>
+              <a:off x="4551998" y="4727258"/>
+              <a:ext cx="1340168" cy="587692"/>
+            </a:xfrm>
+            <a:prstGeom prst="rect">
+              <a:avLst/>
+            </a:prstGeom>
+            <a:solidFill>
+              <a:srgbClr val="FFFFFF"/>
+            </a:solidFill>
+            <a:ln w="14288">
+              <a:solidFill>
+                <a:srgbClr val="5B3FA0"/>
+              </a:solidFill>
+            </a:ln>
+          </p:spPr>
+        </p:sp>
+        <p:sp>
+          <p:nvSpPr>
+            <p:cNvPr id="44" name="Rectangle 44"/>
+            <p:cNvSpPr/>
+            <p:nvPr/>
+          </p:nvSpPr>
+          <p:spPr>
+            <a:xfrm>
+              <a:off x="4558665" y="4734878"/>
+              <a:ext cx="1325880" cy="227648"/>
+            </a:xfrm>
+            <a:prstGeom prst="rect">
+              <a:avLst/>
+            </a:prstGeom>
+            <a:solidFill>
+              <a:srgbClr val="EEEAF7"/>
+            </a:solidFill>
+            <a:ln>
+              <a:noFill/>
+            </a:ln>
+          </p:spPr>
+        </p:sp>
+        <p:sp>
+          <p:nvSpPr>
+            <p:cNvPr id="45" name="Rectangle 45"/>
+            <p:cNvSpPr/>
+            <p:nvPr/>
+          </p:nvSpPr>
+          <p:spPr>
+            <a:xfrm>
+              <a:off x="4551998" y="4957762"/>
+              <a:ext cx="1340168" cy="9525"/>
+            </a:xfrm>
+            <a:prstGeom prst="rect">
+              <a:avLst/>
+            </a:prstGeom>
+            <a:solidFill>
+              <a:srgbClr val="5B3FA0"/>
+            </a:solidFill>
+            <a:ln>
+              <a:noFill/>
+            </a:ln>
+          </p:spPr>
+        </p:sp>
+        <p:sp>
+          <p:nvSpPr>
+            <p:cNvPr id="46" name="Rectangle 46"/>
+            <p:cNvSpPr/>
+            <p:nvPr/>
+          </p:nvSpPr>
+          <p:spPr>
+            <a:xfrm>
+              <a:off x="4551998" y="5053012"/>
+              <a:ext cx="1340168" cy="9525"/>
+            </a:xfrm>
+            <a:prstGeom prst="rect">
+              <a:avLst/>
+            </a:prstGeom>
+            <a:solidFill>
+              <a:srgbClr val="5B3FA0"/>
+            </a:solidFill>
+            <a:ln>
+              <a:noFill/>
+            </a:ln>
+          </p:spPr>
+        </p:sp>
+        <p:sp>
+          <p:nvSpPr>
+            <p:cNvPr id="47" name="TextBox 47"/>
+            <p:cNvSpPr txBox="1"/>
+            <p:nvPr/>
+          </p:nvSpPr>
+          <p:spPr>
+            <a:xfrm>
+              <a:off x="3073317" y="3670459"/>
+              <a:ext cx="547536" cy="190690"/>
+            </a:xfrm>
+            <a:prstGeom prst="rect">
+              <a:avLst/>
+            </a:prstGeom>
+            <a:noFill/>
+            <a:ln>
+              <a:noFill/>
+            </a:ln>
+          </p:spPr>
+          <p:txBody>
+            <a:bodyPr wrap="none" lIns="0" tIns="0" rIns="0" bIns="0" anchor="t" anchorCtr="0">
+              <a:spAutoFit/>
+            </a:bodyPr>
+            <a:lstStyle/>
+            <a:p>
+              <a:pPr algn="ctr"/>
+              <a:r>
+                <a:rPr lang="en-US" sz="980" b="1" i="1" dirty="0">
+                  <a:solidFill>
+                    <a:srgbClr val="462F80"/>
+                  </a:solidFill>
+                  <a:latin typeface="+mn-lt"/>
+                  <a:ea typeface="+mn-ea"/>
+                  <a:cs typeface="+mn-cs"/>
+                </a:rPr>
+                <a:t>Product</a:t>
+              </a:r>
+            </a:p>
+          </p:txBody>
+        </p:sp>
+        <p:sp>
+          <p:nvSpPr>
+            <p:cNvPr id="48" name="TextBox 48"/>
+            <p:cNvSpPr txBox="1"/>
+            <p:nvPr/>
+          </p:nvSpPr>
+          <p:spPr>
+            <a:xfrm>
+              <a:off x="2847022" y="4010025"/>
+              <a:ext cx="815226" cy="176212"/>
+            </a:xfrm>
+            <a:prstGeom prst="rect">
+              <a:avLst/>
+            </a:prstGeom>
+            <a:noFill/>
+            <a:ln>
+              <a:noFill/>
+            </a:ln>
+          </p:spPr>
+          <p:txBody>
+            <a:bodyPr wrap="none" lIns="0" tIns="0" rIns="0" bIns="0" anchor="t" anchorCtr="0">
+              <a:spAutoFit/>
+            </a:bodyPr>
+            <a:lstStyle/>
+            <a:p>
+              <a:pPr algn="l"/>
+              <a:r>
+                <a:rPr lang="en-US" sz="900" dirty="0">
+                  <a:solidFill>
+                    <a:srgbClr val="1F2937"/>
+                  </a:solidFill>
+                  <a:latin typeface="+mn-lt"/>
+                  <a:ea typeface="+mn-ea"/>
+                  <a:cs typeface="+mn-cs"/>
+                </a:rPr>
+                <a:t>+ operation()</a:t>
+              </a:r>
+            </a:p>
+          </p:txBody>
+        </p:sp>
+        <p:sp>
+          <p:nvSpPr>
+            <p:cNvPr id="49" name="TextBox 49"/>
+            <p:cNvSpPr txBox="1"/>
+            <p:nvPr/>
+          </p:nvSpPr>
+          <p:spPr>
+            <a:xfrm>
+              <a:off x="850685" y="4782979"/>
+              <a:ext cx="1241855" cy="190690"/>
+            </a:xfrm>
+            <a:prstGeom prst="rect">
+              <a:avLst/>
+            </a:prstGeom>
+            <a:noFill/>
+            <a:ln>
+              <a:noFill/>
+            </a:ln>
+          </p:spPr>
+          <p:txBody>
+            <a:bodyPr wrap="none" lIns="0" tIns="0" rIns="0" bIns="0" anchor="t" anchorCtr="0">
+              <a:spAutoFit/>
+            </a:bodyPr>
+            <a:lstStyle/>
+            <a:p>
+              <a:pPr algn="ctr"/>
+              <a:r>
+                <a:rPr lang="en-US" sz="980" b="1" dirty="0">
+                  <a:solidFill>
+                    <a:srgbClr val="462F80"/>
+                  </a:solidFill>
+                  <a:latin typeface="+mn-lt"/>
+                  <a:ea typeface="+mn-ea"/>
+                  <a:cs typeface="+mn-cs"/>
+                </a:rPr>
+                <a:t>ConcreteProductA</a:t>
+              </a:r>
+            </a:p>
+          </p:txBody>
+        </p:sp>
+        <p:sp>
+          <p:nvSpPr>
+            <p:cNvPr id="50" name="TextBox 50"/>
+            <p:cNvSpPr txBox="1"/>
+            <p:nvPr/>
+          </p:nvSpPr>
+          <p:spPr>
+            <a:xfrm>
+              <a:off x="872490" y="5122545"/>
+              <a:ext cx="815226" cy="176212"/>
+            </a:xfrm>
+            <a:prstGeom prst="rect">
+              <a:avLst/>
+            </a:prstGeom>
+            <a:noFill/>
+            <a:ln>
+              <a:noFill/>
+            </a:ln>
+          </p:spPr>
+          <p:txBody>
+            <a:bodyPr wrap="none" lIns="0" tIns="0" rIns="0" bIns="0" anchor="t" anchorCtr="0">
+              <a:spAutoFit/>
+            </a:bodyPr>
+            <a:lstStyle/>
+            <a:p>
+              <a:pPr algn="l"/>
+              <a:r>
+                <a:rPr lang="en-US" sz="900" dirty="0">
+                  <a:solidFill>
+                    <a:srgbClr val="1F2937"/>
+                  </a:solidFill>
+                  <a:latin typeface="+mn-lt"/>
+                  <a:ea typeface="+mn-ea"/>
+                  <a:cs typeface="+mn-cs"/>
+                </a:rPr>
+                <a:t>+ operation()</a:t>
+              </a:r>
+            </a:p>
+          </p:txBody>
+        </p:sp>
+        <p:sp>
+          <p:nvSpPr>
+            <p:cNvPr id="51" name="TextBox 51"/>
+            <p:cNvSpPr txBox="1"/>
+            <p:nvPr/>
+          </p:nvSpPr>
+          <p:spPr>
+            <a:xfrm>
+              <a:off x="3073317" y="4782979"/>
+              <a:ext cx="547536" cy="190690"/>
+            </a:xfrm>
+            <a:prstGeom prst="rect">
+              <a:avLst/>
+            </a:prstGeom>
+            <a:noFill/>
+            <a:ln>
+              <a:noFill/>
+            </a:ln>
+          </p:spPr>
+          <p:txBody>
+            <a:bodyPr wrap="none" lIns="0" tIns="0" rIns="0" bIns="0" anchor="t" anchorCtr="0">
+              <a:spAutoFit/>
+            </a:bodyPr>
+            <a:lstStyle/>
+            <a:p>
+              <a:pPr algn="ctr"/>
+              <a:r>
+                <a:rPr lang="en-US" sz="980" b="1" dirty="0">
+                  <a:solidFill>
+                    <a:srgbClr val="462F80"/>
+                  </a:solidFill>
+                  <a:latin typeface="+mn-lt"/>
+                  <a:ea typeface="+mn-ea"/>
+                  <a:cs typeface="+mn-cs"/>
+                </a:rPr>
+                <a:t>Factory</a:t>
+              </a:r>
+            </a:p>
+          </p:txBody>
+        </p:sp>
+        <p:sp>
+          <p:nvSpPr>
+            <p:cNvPr id="52" name="TextBox 52"/>
+            <p:cNvSpPr txBox="1"/>
+            <p:nvPr/>
+          </p:nvSpPr>
+          <p:spPr>
+            <a:xfrm>
+              <a:off x="2636520" y="5122545"/>
+              <a:ext cx="1514742" cy="176212"/>
+            </a:xfrm>
+            <a:prstGeom prst="rect">
+              <a:avLst/>
+            </a:prstGeom>
+            <a:noFill/>
+            <a:ln>
+              <a:noFill/>
+            </a:ln>
+          </p:spPr>
+          <p:txBody>
+            <a:bodyPr wrap="none" lIns="0" tIns="0" rIns="0" bIns="0" anchor="t" anchorCtr="0">
+              <a:spAutoFit/>
+            </a:bodyPr>
+            <a:lstStyle/>
+            <a:p>
+              <a:pPr algn="l"/>
+              <a:r>
+                <a:rPr lang="en-US" sz="900" dirty="0">
+                  <a:solidFill>
+                    <a:srgbClr val="1F2937"/>
+                  </a:solidFill>
+                  <a:latin typeface="+mn-lt"/>
+                  <a:ea typeface="+mn-ea"/>
+                  <a:cs typeface="+mn-cs"/>
+                </a:rPr>
+                <a:t>+ factoryMethod(String)</a:t>
+              </a:r>
+            </a:p>
+          </p:txBody>
+        </p:sp>
+        <p:sp>
+          <p:nvSpPr>
+            <p:cNvPr id="53" name="TextBox 53"/>
+            <p:cNvSpPr txBox="1"/>
+            <p:nvPr/>
+          </p:nvSpPr>
+          <p:spPr>
+            <a:xfrm>
+              <a:off x="4601630" y="4782979"/>
+              <a:ext cx="1241855" cy="190690"/>
+            </a:xfrm>
+            <a:prstGeom prst="rect">
+              <a:avLst/>
+            </a:prstGeom>
+            <a:noFill/>
+            <a:ln>
+              <a:noFill/>
+            </a:ln>
+          </p:spPr>
+          <p:txBody>
+            <a:bodyPr wrap="none" lIns="0" tIns="0" rIns="0" bIns="0" anchor="t" anchorCtr="0">
+              <a:spAutoFit/>
+            </a:bodyPr>
+            <a:lstStyle/>
+            <a:p>
+              <a:pPr algn="ctr"/>
+              <a:r>
+                <a:rPr lang="en-US" sz="980" b="1" dirty="0">
+                  <a:solidFill>
+                    <a:srgbClr val="462F80"/>
+                  </a:solidFill>
+                  <a:latin typeface="+mn-lt"/>
+                  <a:ea typeface="+mn-ea"/>
+                  <a:cs typeface="+mn-cs"/>
+                </a:rPr>
+                <a:t>ConcreteProductB</a:t>
+              </a:r>
+            </a:p>
+          </p:txBody>
+        </p:sp>
+        <p:sp>
+          <p:nvSpPr>
+            <p:cNvPr id="54" name="TextBox 54"/>
+            <p:cNvSpPr txBox="1"/>
+            <p:nvPr/>
+          </p:nvSpPr>
+          <p:spPr>
+            <a:xfrm>
+              <a:off x="4623435" y="5122545"/>
+              <a:ext cx="815226" cy="176212"/>
+            </a:xfrm>
+            <a:prstGeom prst="rect">
+              <a:avLst/>
+            </a:prstGeom>
+            <a:noFill/>
+            <a:ln>
+              <a:noFill/>
+            </a:ln>
+          </p:spPr>
+          <p:txBody>
+            <a:bodyPr wrap="none" lIns="0" tIns="0" rIns="0" bIns="0" anchor="t" anchorCtr="0">
+              <a:spAutoFit/>
+            </a:bodyPr>
+            <a:lstStyle/>
+            <a:p>
+              <a:pPr algn="l"/>
+              <a:r>
+                <a:rPr lang="en-US" sz="900" dirty="0">
+                  <a:solidFill>
+                    <a:srgbClr val="1F2937"/>
+                  </a:solidFill>
+                  <a:latin typeface="+mn-lt"/>
+                  <a:ea typeface="+mn-ea"/>
+                  <a:cs typeface="+mn-cs"/>
+                </a:rPr>
+                <a:t>+ operation()</a:t>
+              </a:r>
+            </a:p>
+          </p:txBody>
+        </p:sp>
+      </p:grpSp>
+      <p:grpSp>
+        <p:nvGrpSpPr>
+          <p:cNvPr id="67" name="c2-kv-1"/>
           <p:cNvGrpSpPr/>
           <p:nvPr/>
         </p:nvGrpSpPr>
@@ -46445,7 +47444,7 @@
         </p:grpSpPr>
         <p:sp>
           <p:nvSpPr>
-            <p:cNvPr id="23" name="TextBox 23"/>
+            <p:cNvPr id="56" name="TextBox 56"/>
             <p:cNvSpPr txBox="1"/>
             <p:nvPr/>
           </p:nvSpPr>
@@ -46485,7 +47484,7 @@
         </p:sp>
         <p:sp>
           <p:nvSpPr>
-            <p:cNvPr id="24" name="TextBox 24"/>
+            <p:cNvPr id="57" name="TextBox 57"/>
             <p:cNvSpPr txBox="1"/>
             <p:nvPr/>
           </p:nvSpPr>
@@ -46541,7 +47540,7 @@
         </p:sp>
         <p:sp>
           <p:nvSpPr>
-            <p:cNvPr id="25" name="Rectangle 25"/>
+            <p:cNvPr id="58" name="Rectangle 58"/>
             <p:cNvSpPr/>
             <p:nvPr/>
           </p:nvSpPr>
@@ -46563,7 +47562,7 @@
         </p:sp>
         <p:sp>
           <p:nvSpPr>
-            <p:cNvPr id="26" name="TextBox 26"/>
+            <p:cNvPr id="59" name="TextBox 59"/>
             <p:cNvSpPr txBox="1"/>
             <p:nvPr/>
           </p:nvSpPr>
@@ -46603,7 +47602,7 @@
         </p:sp>
         <p:sp>
           <p:nvSpPr>
-            <p:cNvPr id="27" name="TextBox 27"/>
+            <p:cNvPr id="60" name="TextBox 60"/>
             <p:cNvSpPr txBox="1"/>
             <p:nvPr/>
           </p:nvSpPr>
@@ -46659,7 +47658,7 @@
         </p:sp>
         <p:sp>
           <p:nvSpPr>
-            <p:cNvPr id="28" name="Rectangle 28"/>
+            <p:cNvPr id="61" name="Rectangle 61"/>
             <p:cNvSpPr/>
             <p:nvPr/>
           </p:nvSpPr>
@@ -46681,7 +47680,7 @@
         </p:sp>
         <p:sp>
           <p:nvSpPr>
-            <p:cNvPr id="29" name="TextBox 29"/>
+            <p:cNvPr id="62" name="TextBox 62"/>
             <p:cNvSpPr txBox="1"/>
             <p:nvPr/>
           </p:nvSpPr>
@@ -46721,7 +47720,7 @@
         </p:sp>
         <p:sp>
           <p:nvSpPr>
-            <p:cNvPr id="30" name="TextBox 30"/>
+            <p:cNvPr id="63" name="TextBox 63"/>
             <p:cNvSpPr txBox="1"/>
             <p:nvPr/>
           </p:nvSpPr>
@@ -46761,7 +47760,7 @@
         </p:sp>
         <p:sp>
           <p:nvSpPr>
-            <p:cNvPr id="31" name="Rectangle 31"/>
+            <p:cNvPr id="64" name="Rectangle 64"/>
             <p:cNvSpPr/>
             <p:nvPr/>
           </p:nvSpPr>
@@ -46783,7 +47782,7 @@
         </p:sp>
         <p:sp>
           <p:nvSpPr>
-            <p:cNvPr id="32" name="TextBox 32"/>
+            <p:cNvPr id="65" name="TextBox 65"/>
             <p:cNvSpPr txBox="1"/>
             <p:nvPr/>
           </p:nvSpPr>
@@ -46823,7 +47822,7 @@
         </p:sp>
         <p:sp>
           <p:nvSpPr>
-            <p:cNvPr id="33" name="TextBox 33"/>
+            <p:cNvPr id="66" name="TextBox 66"/>
             <p:cNvSpPr txBox="1"/>
             <p:nvPr/>
           </p:nvSpPr>
@@ -46864,7 +47863,7 @@
       </p:grpSp>
       <p:grpSp>
         <p:nvGrpSpPr>
-          <p:cNvPr id="48" name="c2-card-2"/>
+          <p:cNvPr id="81" name="c2-card-2"/>
           <p:cNvGrpSpPr/>
           <p:nvPr/>
         </p:nvGrpSpPr>
@@ -46878,7 +47877,7 @@
         </p:grpSpPr>
         <p:sp>
           <p:nvSpPr>
-            <p:cNvPr id="35" name="Rectangle 35"/>
+            <p:cNvPr id="68" name="Rectangle 68"/>
             <p:cNvSpPr/>
             <p:nvPr/>
           </p:nvSpPr>
@@ -46902,7 +47901,7 @@
         </p:sp>
         <p:sp>
           <p:nvSpPr>
-            <p:cNvPr id="36" name="Rectangle 36"/>
+            <p:cNvPr id="69" name="Rectangle 69"/>
             <p:cNvSpPr/>
             <p:nvPr/>
           </p:nvSpPr>
@@ -46926,7 +47925,7 @@
         </p:sp>
         <p:sp>
           <p:nvSpPr>
-            <p:cNvPr id="37" name="TextBox 37"/>
+            <p:cNvPr id="70" name="TextBox 70"/>
             <p:cNvSpPr txBox="1"/>
             <p:nvPr/>
           </p:nvSpPr>
@@ -46966,7 +47965,7 @@
         </p:sp>
         <p:sp>
           <p:nvSpPr>
-            <p:cNvPr id="38" name="TextBox 38"/>
+            <p:cNvPr id="71" name="TextBox 71"/>
             <p:cNvSpPr txBox="1"/>
             <p:nvPr/>
           </p:nvSpPr>
@@ -47006,7 +48005,7 @@
         </p:sp>
         <p:sp>
           <p:nvSpPr>
-            <p:cNvPr id="39" name="Ellipse 39"/>
+            <p:cNvPr id="72" name="Ellipse 72"/>
             <p:cNvSpPr/>
             <p:nvPr/>
           </p:nvSpPr>
@@ -47028,7 +48027,7 @@
         </p:sp>
         <p:sp>
           <p:nvSpPr>
-            <p:cNvPr id="40" name="TextBox 40"/>
+            <p:cNvPr id="73" name="TextBox 73"/>
             <p:cNvSpPr txBox="1"/>
             <p:nvPr/>
           </p:nvSpPr>
@@ -47068,7 +48067,7 @@
         </p:sp>
         <p:sp>
           <p:nvSpPr>
-            <p:cNvPr id="41" name="TextBox 41"/>
+            <p:cNvPr id="74" name="TextBox 74"/>
             <p:cNvSpPr txBox="1"/>
             <p:nvPr/>
           </p:nvSpPr>
@@ -47108,7 +48107,7 @@
         </p:sp>
         <p:sp>
           <p:nvSpPr>
-            <p:cNvPr id="42" name="Ellipse 42"/>
+            <p:cNvPr id="75" name="Ellipse 75"/>
             <p:cNvSpPr/>
             <p:nvPr/>
           </p:nvSpPr>
@@ -47130,7 +48129,7 @@
         </p:sp>
         <p:sp>
           <p:nvSpPr>
-            <p:cNvPr id="43" name="TextBox 43"/>
+            <p:cNvPr id="76" name="TextBox 76"/>
             <p:cNvSpPr txBox="1"/>
             <p:nvPr/>
           </p:nvSpPr>
@@ -47170,7 +48169,7 @@
         </p:sp>
         <p:sp>
           <p:nvSpPr>
-            <p:cNvPr id="44" name="TextBox 44"/>
+            <p:cNvPr id="77" name="TextBox 77"/>
             <p:cNvSpPr txBox="1"/>
             <p:nvPr/>
           </p:nvSpPr>
@@ -47210,7 +48209,7 @@
         </p:sp>
         <p:sp>
           <p:nvSpPr>
-            <p:cNvPr id="45" name="Ellipse 45"/>
+            <p:cNvPr id="78" name="Ellipse 78"/>
             <p:cNvSpPr/>
             <p:nvPr/>
           </p:nvSpPr>
@@ -47232,7 +48231,7 @@
         </p:sp>
         <p:sp>
           <p:nvSpPr>
-            <p:cNvPr id="46" name="TextBox 46"/>
+            <p:cNvPr id="79" name="TextBox 79"/>
             <p:cNvSpPr txBox="1"/>
             <p:nvPr/>
           </p:nvSpPr>
@@ -47272,7 +48271,7 @@
         </p:sp>
         <p:sp>
           <p:nvSpPr>
-            <p:cNvPr id="47" name="TextBox 47"/>
+            <p:cNvPr id="80" name="TextBox 80"/>
             <p:cNvSpPr txBox="1"/>
             <p:nvPr/>
           </p:nvSpPr>
@@ -47313,7 +48312,7 @@
       </p:grpSp>
       <p:grpSp>
         <p:nvGrpSpPr>
-          <p:cNvPr id="54" name="takeaway"/>
+          <p:cNvPr id="87" name="takeaway"/>
           <p:cNvGrpSpPr/>
           <p:nvPr/>
         </p:nvGrpSpPr>
@@ -47327,7 +48326,7 @@
         </p:grpSpPr>
         <p:sp>
           <p:nvSpPr>
-            <p:cNvPr id="49" name="Rectangle 49"/>
+            <p:cNvPr id="82" name="Rectangle 82"/>
             <p:cNvSpPr/>
             <p:nvPr/>
           </p:nvSpPr>
@@ -47351,7 +48350,7 @@
         </p:sp>
         <p:grpSp>
           <p:nvGrpSpPr>
-            <p:cNvPr id="52" name="Group 52"/>
+            <p:cNvPr id="85" name="Group 85"/>
             <p:cNvGrpSpPr/>
             <p:nvPr/>
           </p:nvGrpSpPr>
@@ -47365,7 +48364,7 @@
           </p:grpSpPr>
           <p:sp>
             <p:nvSpPr>
-              <p:cNvPr id="50" name="Freeform 50"/>
+              <p:cNvPr id="83" name="Freeform 83"/>
               <p:cNvSpPr/>
               <p:nvPr/>
             </p:nvSpPr>
@@ -47504,7 +48503,7 @@
           </p:sp>
           <p:sp>
             <p:nvSpPr>
-              <p:cNvPr id="51" name="Freeform 51"/>
+              <p:cNvPr id="84" name="Freeform 84"/>
               <p:cNvSpPr/>
               <p:nvPr/>
             </p:nvSpPr>
@@ -47541,7 +48540,7 @@
         </p:grpSp>
         <p:sp>
           <p:nvSpPr>
-            <p:cNvPr id="53" name="TextBox 53"/>
+            <p:cNvPr id="86" name="TextBox 86"/>
             <p:cNvSpPr txBox="1"/>
             <p:nvPr/>
           </p:nvSpPr>
@@ -47582,7 +48581,7 @@
       </p:grpSp>
       <p:grpSp>
         <p:nvGrpSpPr>
-          <p:cNvPr id="57" name="footer"/>
+          <p:cNvPr id="90" name="footer"/>
           <p:cNvGrpSpPr/>
           <p:nvPr/>
         </p:nvGrpSpPr>
@@ -47596,7 +48595,7 @@
         </p:grpSpPr>
         <p:sp>
           <p:nvSpPr>
-            <p:cNvPr id="55" name="TextBox 55"/>
+            <p:cNvPr id="88" name="TextBox 88"/>
             <p:cNvSpPr txBox="1"/>
             <p:nvPr/>
           </p:nvSpPr>
@@ -47636,7 +48635,7 @@
         </p:sp>
         <p:sp>
           <p:nvSpPr>
-            <p:cNvPr id="56" name="TextBox 56"/>
+            <p:cNvPr id="89" name="TextBox 89"/>
             <p:cNvSpPr txBox="1"/>
             <p:nvPr/>
           </p:nvSpPr>
@@ -50488,9 +51487,9 @@
         <p:grpSpPr>
           <a:xfrm>
             <a:off x="533400" y="4956810"/>
-            <a:ext cx="11125200" cy="1272540"/>
+            <a:ext cx="11125200" cy="1405890"/>
             <a:chOff x="533400" y="4956810"/>
-            <a:chExt cx="11125200" cy="1272540"/>
+            <a:chExt cx="11125200" cy="1405890"/>
           </a:xfrm>
         </p:grpSpPr>
         <p:sp>
@@ -50502,11 +51501,11 @@
           <p:spPr>
             <a:xfrm>
               <a:off x="533400" y="4956810"/>
-              <a:ext cx="11125200" cy="1272540"/>
+              <a:ext cx="11125200" cy="1405890"/>
             </a:xfrm>
             <a:prstGeom prst="roundRect">
               <a:avLst>
-                <a:gd name="adj" fmla="val 10479"/>
+                <a:gd name="adj" fmla="val 9485"/>
               </a:avLst>
             </a:prstGeom>
             <a:solidFill>
@@ -50528,7 +51527,7 @@
           <p:spPr>
             <a:xfrm>
               <a:off x="542925" y="5090160"/>
-              <a:ext cx="47625" cy="1005840"/>
+              <a:ext cx="47625" cy="1139190"/>
             </a:xfrm>
             <a:prstGeom prst="roundRect">
               <a:avLst>
@@ -56125,7 +57124,7 @@
           <p:spPr>
             <a:xfrm>
               <a:off x="6428422" y="2563178"/>
-              <a:ext cx="2092643" cy="523875"/>
+              <a:ext cx="1997393" cy="523875"/>
             </a:xfrm>
             <a:custGeom>
               <a:avLst/>
@@ -56134,7 +57133,7 @@
               <a:cxnLst/>
               <a:rect l="l" t="t" r="r" b="b"/>
               <a:pathLst>
-                <a:path w="2092643" h="523875">
+                <a:path w="1997393" h="523875">
                   <a:moveTo>
                     <a:pt x="0" y="523875"/>
                   </a:moveTo>
@@ -56142,10 +57141,10 @@
                     <a:pt x="0" y="199072"/>
                   </a:lnTo>
                   <a:lnTo>
-                    <a:pt x="2092643" y="199072"/>
+                    <a:pt x="1997393" y="199072"/>
                   </a:lnTo>
                   <a:lnTo>
-                    <a:pt x="2092643" y="0"/>
+                    <a:pt x="1997393" y="0"/>
                   </a:lnTo>
                 </a:path>
               </a:pathLst>
@@ -56166,7 +57165,7 @@
           </p:nvSpPr>
           <p:spPr>
             <a:xfrm>
-              <a:off x="8447722" y="2437448"/>
+              <a:off x="8352472" y="2437448"/>
               <a:ext cx="146685" cy="125730"/>
             </a:xfrm>
             <a:custGeom>
@@ -56208,8 +57207,8 @@
           </p:nvSpPr>
           <p:spPr>
             <a:xfrm>
-              <a:off x="8521065" y="2563178"/>
-              <a:ext cx="2091690" cy="523875"/>
+              <a:off x="8616315" y="2563178"/>
+              <a:ext cx="1996440" cy="523875"/>
             </a:xfrm>
             <a:custGeom>
               <a:avLst/>
@@ -56218,12 +57217,12 @@
               <a:cxnLst/>
               <a:rect l="l" t="t" r="r" b="b"/>
               <a:pathLst>
-                <a:path w="2091690" h="523875">
+                <a:path w="1996440" h="523875">
                   <a:moveTo>
-                    <a:pt x="2091690" y="523875"/>
+                    <a:pt x="1996440" y="523875"/>
                   </a:moveTo>
                   <a:lnTo>
-                    <a:pt x="2091690" y="199072"/>
+                    <a:pt x="1996440" y="199072"/>
                   </a:lnTo>
                   <a:lnTo>
                     <a:pt x="0" y="199072"/>
@@ -56250,7 +57249,7 @@
           </p:nvSpPr>
           <p:spPr>
             <a:xfrm>
-              <a:off x="8447722" y="2437448"/>
+              <a:off x="8542972" y="2437448"/>
               <a:ext cx="146685" cy="125730"/>
             </a:xfrm>
             <a:custGeom>
